--- a/statistics_02_binomial_distribution.pptx
+++ b/statistics_02_binomial_distribution.pptx
@@ -13405,8 +13405,8 @@
         </p:nvSpPr>
         <p:spPr>
           <a:xfrm>
-            <a:off x="201541" y="4655741"/>
-            <a:ext cx="5462659" cy="2031325"/>
+            <a:off x="303250" y="4253496"/>
+            <a:ext cx="4940458" cy="2246769"/>
           </a:xfrm>
           <a:prstGeom prst="rect">
             <a:avLst/>
@@ -13435,7 +13435,7 @@
             </a:r>
             <a:r>
               <a:rPr lang="en-US" dirty="0"/>
-              <a:t>) is binomial coefficient (Google also for Pascal Triangle)</a:t>
+              <a:t>) is binomial coefficient (see also Pascal Triangle)</a:t>
             </a:r>
           </a:p>
           <a:p>
@@ -13449,8 +13449,34 @@
           </a:p>
           <a:p>
             <a:r>
+              <a:rPr lang="en-US" b="1" dirty="0">
+                <a:solidFill>
+                  <a:srgbClr val="0070C0"/>
+                </a:solidFill>
+              </a:rPr>
+              <a:t>de </a:t>
+            </a:r>
+            <a:r>
+              <a:rPr lang="en-US" b="1" dirty="0" err="1">
+                <a:solidFill>
+                  <a:srgbClr val="0070C0"/>
+                </a:solidFill>
+              </a:rPr>
+              <a:t>Moivre</a:t>
+            </a:r>
+            <a:r>
+              <a:rPr lang="en-US" b="1" dirty="0">
+                <a:solidFill>
+                  <a:srgbClr val="0070C0"/>
+                </a:solidFill>
+              </a:rPr>
+              <a:t>–Laplace theorem</a:t>
+            </a:r>
+          </a:p>
+          <a:p>
+            <a:r>
               <a:rPr lang="en-US" dirty="0"/>
-              <a:t>At large numbers the Binomial distribution approaches </a:t>
+              <a:t>At large numbers the Binomial distribution may approach </a:t>
             </a:r>
           </a:p>
           <a:p>
@@ -13526,7 +13552,7 @@
         </p:blipFill>
         <p:spPr bwMode="auto">
           <a:xfrm>
-            <a:off x="929904" y="3021292"/>
+            <a:off x="929904" y="2858732"/>
             <a:ext cx="3886200" cy="1511300"/>
           </a:xfrm>
           <a:prstGeom prst="rect">
@@ -13619,6 +13645,270 @@
               <a:rPr lang="en-US" dirty="0"/>
               <a:t>(1655 – 1705)</a:t>
             </a:r>
+          </a:p>
+        </p:txBody>
+      </p:sp>
+      <p:pic>
+        <p:nvPicPr>
+          <p:cNvPr id="2" name="Picture 2" descr="Mathematics Of The Galton Board With Normal Distribution Stock Illustration  - Download Image Now - iStock">
+            <a:extLst>
+              <a:ext uri="{FF2B5EF4-FFF2-40B4-BE49-F238E27FC236}">
+                <a16:creationId xmlns:a16="http://schemas.microsoft.com/office/drawing/2014/main" id="{E19AA15E-24A3-E246-BF30-71AD952062D7}"/>
+              </a:ext>
+            </a:extLst>
+          </p:cNvPr>
+          <p:cNvPicPr>
+            <a:picLocks noChangeAspect="1" noChangeArrowheads="1"/>
+          </p:cNvPicPr>
+          <p:nvPr/>
+        </p:nvPicPr>
+        <p:blipFill>
+          <a:blip r:embed="rId5" cstate="email">
+            <a:extLst>
+              <a:ext uri="{28A0092B-C50C-407E-A947-70E740481C1C}">
+                <a14:useLocalDpi xmlns:a14="http://schemas.microsoft.com/office/drawing/2010/main"/>
+              </a:ext>
+            </a:extLst>
+          </a:blip>
+          <a:srcRect/>
+          <a:stretch>
+            <a:fillRect/>
+          </a:stretch>
+        </p:blipFill>
+        <p:spPr bwMode="auto">
+          <a:xfrm>
+            <a:off x="9428480" y="1010692"/>
+            <a:ext cx="2561978" cy="4778819"/>
+          </a:xfrm>
+          <a:prstGeom prst="rect">
+            <a:avLst/>
+          </a:prstGeom>
+          <a:noFill/>
+          <a:extLst>
+            <a:ext uri="{909E8E84-426E-40DD-AFC4-6F175D3DCCD1}">
+              <a14:hiddenFill xmlns:a14="http://schemas.microsoft.com/office/drawing/2010/main">
+                <a:solidFill>
+                  <a:srgbClr val="FFFFFF"/>
+                </a:solidFill>
+              </a14:hiddenFill>
+            </a:ext>
+          </a:extLst>
+        </p:spPr>
+      </p:pic>
+      <p:sp>
+        <p:nvSpPr>
+          <p:cNvPr id="3" name="TextBox 2">
+            <a:extLst>
+              <a:ext uri="{FF2B5EF4-FFF2-40B4-BE49-F238E27FC236}">
+                <a16:creationId xmlns:a16="http://schemas.microsoft.com/office/drawing/2014/main" id="{08E2CE09-B2AA-F84B-A192-9EE71D7AC774}"/>
+              </a:ext>
+            </a:extLst>
+          </p:cNvPr>
+          <p:cNvSpPr txBox="1"/>
+          <p:nvPr/>
+        </p:nvSpPr>
+        <p:spPr>
+          <a:xfrm>
+            <a:off x="9845869" y="456694"/>
+            <a:ext cx="1727200" cy="369332"/>
+          </a:xfrm>
+          <a:prstGeom prst="rect">
+            <a:avLst/>
+          </a:prstGeom>
+          <a:noFill/>
+        </p:spPr>
+        <p:txBody>
+          <a:bodyPr wrap="square" rtlCol="0">
+            <a:spAutoFit/>
+          </a:bodyPr>
+          <a:lstStyle/>
+          <a:p>
+            <a:pPr algn="ctr"/>
+            <a:r>
+              <a:rPr lang="en-US" sz="1800" b="1" dirty="0">
+                <a:solidFill>
+                  <a:srgbClr val="0070C0"/>
+                </a:solidFill>
+              </a:rPr>
+              <a:t>Galton Board</a:t>
+            </a:r>
+          </a:p>
+        </p:txBody>
+      </p:sp>
+      <p:sp>
+        <p:nvSpPr>
+          <p:cNvPr id="11" name="TextBox 10">
+            <a:extLst>
+              <a:ext uri="{FF2B5EF4-FFF2-40B4-BE49-F238E27FC236}">
+                <a16:creationId xmlns:a16="http://schemas.microsoft.com/office/drawing/2014/main" id="{552A0ED6-269B-894D-9F0A-1627F19182D6}"/>
+              </a:ext>
+            </a:extLst>
+          </p:cNvPr>
+          <p:cNvSpPr txBox="1"/>
+          <p:nvPr/>
+        </p:nvSpPr>
+        <p:spPr>
+          <a:xfrm>
+            <a:off x="7521533" y="1736341"/>
+            <a:ext cx="1676692" cy="523220"/>
+          </a:xfrm>
+          <a:prstGeom prst="rect">
+            <a:avLst/>
+          </a:prstGeom>
+          <a:noFill/>
+        </p:spPr>
+        <p:txBody>
+          <a:bodyPr wrap="square" rtlCol="0">
+            <a:spAutoFit/>
+          </a:bodyPr>
+          <a:lstStyle/>
+          <a:p>
+            <a:pPr algn="ctr"/>
+            <a:r>
+              <a:rPr lang="en-US" dirty="0">
+                <a:latin typeface="+mn-lt"/>
+                <a:cs typeface="Calibri" panose="020F0502020204030204" pitchFamily="34" charset="0"/>
+              </a:rPr>
+              <a:t>Sir Francis Galton</a:t>
+            </a:r>
+          </a:p>
+          <a:p>
+            <a:pPr algn="ctr"/>
+            <a:r>
+              <a:rPr lang="en-US" dirty="0">
+                <a:latin typeface="+mn-lt"/>
+                <a:cs typeface="Calibri" panose="020F0502020204030204" pitchFamily="34" charset="0"/>
+              </a:rPr>
+              <a:t>(1822-1911)</a:t>
+            </a:r>
+          </a:p>
+        </p:txBody>
+      </p:sp>
+      <p:pic>
+        <p:nvPicPr>
+          <p:cNvPr id="12" name="Picture 11">
+            <a:extLst>
+              <a:ext uri="{FF2B5EF4-FFF2-40B4-BE49-F238E27FC236}">
+                <a16:creationId xmlns:a16="http://schemas.microsoft.com/office/drawing/2014/main" id="{A3B72A4D-C437-E34D-80BB-61C44B393915}"/>
+              </a:ext>
+            </a:extLst>
+          </p:cNvPr>
+          <p:cNvPicPr>
+            <a:picLocks noChangeAspect="1"/>
+          </p:cNvPicPr>
+          <p:nvPr/>
+        </p:nvPicPr>
+        <p:blipFill rotWithShape="1">
+          <a:blip r:embed="rId6" cstate="email">
+            <a:extLst>
+              <a:ext uri="{28A0092B-C50C-407E-A947-70E740481C1C}">
+                <a14:useLocalDpi xmlns:a14="http://schemas.microsoft.com/office/drawing/2010/main"/>
+              </a:ext>
+            </a:extLst>
+          </a:blip>
+          <a:srcRect/>
+          <a:stretch/>
+        </p:blipFill>
+        <p:spPr>
+          <a:xfrm>
+            <a:off x="7692261" y="188918"/>
+            <a:ext cx="1335237" cy="1517962"/>
+          </a:xfrm>
+          <a:prstGeom prst="rect">
+            <a:avLst/>
+          </a:prstGeom>
+        </p:spPr>
+      </p:pic>
+      <p:pic>
+        <p:nvPicPr>
+          <p:cNvPr id="5" name="Picture 2" descr="Pascal's triangle - Wikipedia">
+            <a:extLst>
+              <a:ext uri="{FF2B5EF4-FFF2-40B4-BE49-F238E27FC236}">
+                <a16:creationId xmlns:a16="http://schemas.microsoft.com/office/drawing/2014/main" id="{F855EF05-2C7D-934F-95CE-4517FD384602}"/>
+              </a:ext>
+            </a:extLst>
+          </p:cNvPr>
+          <p:cNvPicPr>
+            <a:picLocks noChangeAspect="1" noChangeArrowheads="1"/>
+          </p:cNvPicPr>
+          <p:nvPr/>
+        </p:nvPicPr>
+        <p:blipFill>
+          <a:blip r:embed="rId7" cstate="email">
+            <a:extLst>
+              <a:ext uri="{28A0092B-C50C-407E-A947-70E740481C1C}">
+                <a14:useLocalDpi xmlns:a14="http://schemas.microsoft.com/office/drawing/2010/main"/>
+              </a:ext>
+            </a:extLst>
+          </a:blip>
+          <a:srcRect/>
+          <a:stretch>
+            <a:fillRect/>
+          </a:stretch>
+        </p:blipFill>
+        <p:spPr bwMode="auto">
+          <a:xfrm>
+            <a:off x="5989158" y="3711043"/>
+            <a:ext cx="1918272" cy="1584322"/>
+          </a:xfrm>
+          <a:prstGeom prst="rect">
+            <a:avLst/>
+          </a:prstGeom>
+          <a:noFill/>
+          <a:extLst>
+            <a:ext uri="{909E8E84-426E-40DD-AFC4-6F175D3DCCD1}">
+              <a14:hiddenFill xmlns:a14="http://schemas.microsoft.com/office/drawing/2010/main">
+                <a:solidFill>
+                  <a:srgbClr val="FFFFFF"/>
+                </a:solidFill>
+              </a14:hiddenFill>
+            </a:ext>
+          </a:extLst>
+        </p:spPr>
+      </p:pic>
+      <p:sp>
+        <p:nvSpPr>
+          <p:cNvPr id="7" name="Right Arrow 6">
+            <a:extLst>
+              <a:ext uri="{FF2B5EF4-FFF2-40B4-BE49-F238E27FC236}">
+                <a16:creationId xmlns:a16="http://schemas.microsoft.com/office/drawing/2014/main" id="{FE3AB8B4-3F58-F547-AB80-19D547EEF927}"/>
+              </a:ext>
+            </a:extLst>
+          </p:cNvPr>
+          <p:cNvSpPr/>
+          <p:nvPr/>
+        </p:nvSpPr>
+        <p:spPr>
+          <a:xfrm>
+            <a:off x="5243707" y="4584356"/>
+            <a:ext cx="613396" cy="121396"/>
+          </a:xfrm>
+          <a:prstGeom prst="rightArrow">
+            <a:avLst/>
+          </a:prstGeom>
+        </p:spPr>
+        <p:style>
+          <a:lnRef idx="2">
+            <a:schemeClr val="accent1">
+              <a:shade val="50000"/>
+            </a:schemeClr>
+          </a:lnRef>
+          <a:fillRef idx="1">
+            <a:schemeClr val="accent1"/>
+          </a:fillRef>
+          <a:effectRef idx="0">
+            <a:schemeClr val="accent1"/>
+          </a:effectRef>
+          <a:fontRef idx="minor">
+            <a:schemeClr val="lt1"/>
+          </a:fontRef>
+        </p:style>
+        <p:txBody>
+          <a:bodyPr rtlCol="0" anchor="ctr"/>
+          <a:lstStyle/>
+          <a:p>
+            <a:pPr algn="ctr"/>
+            <a:endParaRPr lang="en-US"/>
           </a:p>
         </p:txBody>
       </p:sp>
@@ -15528,7 +15818,7 @@
         </p:blipFill>
         <p:spPr>
           <a:xfrm>
-            <a:off x="10442586" y="3445039"/>
+            <a:off x="10578510" y="3472383"/>
             <a:ext cx="489437" cy="506917"/>
           </a:xfrm>
           <a:prstGeom prst="rect">
@@ -15917,7 +16207,7 @@
                 <a:cs typeface="Calibri"/>
                 <a:sym typeface="Calibri"/>
               </a:rPr>
-              <a:t>So we can estimate the error for 2</a:t>
+              <a:t>So we can estimate the error </a:t>
             </a:r>
             <a:r>
               <a:rPr lang="el-GR" b="1" dirty="0">
@@ -15938,7 +16228,7 @@
                 <a:cs typeface="Calibri"/>
                 <a:sym typeface="Calibri"/>
               </a:rPr>
-              <a:t> (~ 95% confidence) as:</a:t>
+              <a:t> as:</a:t>
             </a:r>
           </a:p>
           <a:p>
@@ -15953,6 +16243,18 @@
               <a:t>          </a:t>
             </a:r>
             <a:r>
+              <a:rPr lang="el-GR" b="1" dirty="0">
+                <a:solidFill>
+                  <a:srgbClr val="0070C0"/>
+                </a:solidFill>
+                <a:latin typeface="Calibri"/>
+                <a:ea typeface="Calibri"/>
+                <a:cs typeface="Calibri"/>
+                <a:sym typeface="Calibri"/>
+              </a:rPr>
+              <a:t>σ</a:t>
+            </a:r>
+            <a:r>
               <a:rPr lang="en-US" b="1" dirty="0">
                 <a:solidFill>
                   <a:srgbClr val="0070C0"/>
@@ -15962,31 +16264,7 @@
                 <a:cs typeface="Calibri"/>
                 <a:sym typeface="Calibri"/>
               </a:rPr>
-              <a:t>2</a:t>
-            </a:r>
-            <a:r>
-              <a:rPr lang="el-GR" b="1" dirty="0">
-                <a:solidFill>
-                  <a:srgbClr val="0070C0"/>
-                </a:solidFill>
-                <a:latin typeface="Calibri"/>
-                <a:ea typeface="Calibri"/>
-                <a:cs typeface="Calibri"/>
-                <a:sym typeface="Calibri"/>
-              </a:rPr>
-              <a:t>σ</a:t>
-            </a:r>
-            <a:r>
-              <a:rPr lang="en-US" b="1" dirty="0">
-                <a:solidFill>
-                  <a:srgbClr val="0070C0"/>
-                </a:solidFill>
-                <a:latin typeface="Calibri"/>
-                <a:ea typeface="Calibri"/>
-                <a:cs typeface="Calibri"/>
-                <a:sym typeface="Calibri"/>
-              </a:rPr>
-              <a:t> ~ √n </a:t>
+              <a:t> ~ √n/2 </a:t>
             </a:r>
           </a:p>
           <a:p>
@@ -16016,7 +16294,7 @@
                 <a:cs typeface="Calibri"/>
                 <a:sym typeface="Calibri"/>
               </a:rPr>
-              <a:t>If we estimate error for ratio "x/n", it will be then:</a:t>
+              <a:t>If we estimate error for ratio "x/n", we divide by n:</a:t>
             </a:r>
           </a:p>
         </p:txBody>
@@ -16347,8 +16625,8 @@
         </p:nvSpPr>
         <p:spPr>
           <a:xfrm>
-            <a:off x="6749240" y="4080567"/>
-            <a:ext cx="4167807" cy="307777"/>
+            <a:off x="6808873" y="4080567"/>
+            <a:ext cx="4108174" cy="738664"/>
           </a:xfrm>
           <a:prstGeom prst="rect">
             <a:avLst/>
@@ -16366,17 +16644,69 @@
                 <a:latin typeface="Calibri"/>
                 <a:cs typeface="Calibri"/>
               </a:rPr>
-              <a:t>And hence the value of maximum error (E) is given by:</a:t>
+              <a:t>We express error E in terms of Z (number of </a:t>
+            </a:r>
+            <a:r>
+              <a:rPr lang="en-US" dirty="0" err="1">
+                <a:latin typeface="Calibri"/>
+                <a:cs typeface="Calibri"/>
+              </a:rPr>
+              <a:t>sigmas</a:t>
+            </a:r>
+            <a:r>
+              <a:rPr lang="en-US" dirty="0">
+                <a:latin typeface="Calibri"/>
+                <a:cs typeface="Calibri"/>
+              </a:rPr>
+              <a:t>): </a:t>
+            </a:r>
+          </a:p>
+          <a:p>
+            <a:r>
+              <a:rPr lang="en-US" dirty="0">
+                <a:latin typeface="Calibri"/>
+                <a:cs typeface="Calibri"/>
+              </a:rPr>
+              <a:t>            E = Z</a:t>
+            </a:r>
+            <a:r>
+              <a:rPr lang="el-GR" dirty="0">
+                <a:latin typeface="Calibri"/>
+                <a:cs typeface="Calibri"/>
+                <a:sym typeface="Calibri"/>
+              </a:rPr>
+              <a:t>σ</a:t>
+            </a:r>
+            <a:r>
+              <a:rPr lang="en-US" dirty="0">
+                <a:latin typeface="Calibri"/>
+                <a:cs typeface="Calibri"/>
+                <a:sym typeface="Calibri"/>
+              </a:rPr>
+              <a:t> = Z/2√n</a:t>
+            </a:r>
+          </a:p>
+          <a:p>
+            <a:r>
+              <a:rPr lang="en-US" dirty="0">
+                <a:solidFill>
+                  <a:schemeClr val="tx1"/>
+                </a:solidFill>
+                <a:latin typeface="Calibri"/>
+                <a:cs typeface="Calibri"/>
+                <a:sym typeface="Calibri"/>
+              </a:rPr>
+              <a:t>or:</a:t>
             </a:r>
           </a:p>
         </p:txBody>
       </p:sp>
       <p:pic>
         <p:nvPicPr>
-          <p:cNvPr id="11" name="Picture 10">
+          <p:cNvPr id="12" name="Picture 11">
             <a:extLst>
               <a:ext uri="{FF2B5EF4-FFF2-40B4-BE49-F238E27FC236}">
-                <a16:creationId xmlns:a16="http://schemas.microsoft.com/office/drawing/2014/main" id="{72637CC1-BEE4-154D-98AD-65986D051565}"/>
+                <a16:creationId xmlns:a16="http://schemas.microsoft.com/office/drawing/2014/main" id="{4BC789A4-98D4-F041-9CDE-34D490398ACE}"/>
               </a:ext>
             </a:extLst>
           </p:cNvPr>
@@ -16399,81 +16729,7 @@
         </p:blipFill>
         <p:spPr>
           <a:xfrm>
-            <a:off x="7643965" y="4336930"/>
-            <a:ext cx="1427265" cy="531726"/>
-          </a:xfrm>
-          <a:prstGeom prst="rect">
-            <a:avLst/>
-          </a:prstGeom>
-        </p:spPr>
-      </p:pic>
-      <p:sp>
-        <p:nvSpPr>
-          <p:cNvPr id="14" name="TextBox 13">
-            <a:extLst>
-              <a:ext uri="{FF2B5EF4-FFF2-40B4-BE49-F238E27FC236}">
-                <a16:creationId xmlns:a16="http://schemas.microsoft.com/office/drawing/2014/main" id="{638FBC29-A8F9-284A-A1BF-DA59A1CFE356}"/>
-              </a:ext>
-            </a:extLst>
-          </p:cNvPr>
-          <p:cNvSpPr txBox="1"/>
-          <p:nvPr/>
-        </p:nvSpPr>
-        <p:spPr>
-          <a:xfrm>
-            <a:off x="6749240" y="4786008"/>
-            <a:ext cx="430695" cy="307777"/>
-          </a:xfrm>
-          <a:prstGeom prst="rect">
-            <a:avLst/>
-          </a:prstGeom>
-          <a:noFill/>
-        </p:spPr>
-        <p:txBody>
-          <a:bodyPr wrap="square" rtlCol="0">
-            <a:spAutoFit/>
-          </a:bodyPr>
-          <a:lstStyle/>
-          <a:p>
-            <a:r>
-              <a:rPr lang="en-US" dirty="0">
-                <a:latin typeface="Calibri"/>
-                <a:cs typeface="Calibri"/>
-              </a:rPr>
-              <a:t>Or:</a:t>
-            </a:r>
-          </a:p>
-        </p:txBody>
-      </p:sp>
-      <p:pic>
-        <p:nvPicPr>
-          <p:cNvPr id="12" name="Picture 11">
-            <a:extLst>
-              <a:ext uri="{FF2B5EF4-FFF2-40B4-BE49-F238E27FC236}">
-                <a16:creationId xmlns:a16="http://schemas.microsoft.com/office/drawing/2014/main" id="{4BC789A4-98D4-F041-9CDE-34D490398ACE}"/>
-              </a:ext>
-            </a:extLst>
-          </p:cNvPr>
-          <p:cNvPicPr>
-            <a:picLocks noChangeAspect="1"/>
-          </p:cNvPicPr>
-          <p:nvPr/>
-        </p:nvPicPr>
-        <p:blipFill>
-          <a:blip r:embed="rId7" cstate="email">
-            <a:extLst>
-              <a:ext uri="{28A0092B-C50C-407E-A947-70E740481C1C}">
-                <a14:useLocalDpi xmlns:a14="http://schemas.microsoft.com/office/drawing/2010/main"/>
-              </a:ext>
-            </a:extLst>
-          </a:blip>
-          <a:stretch>
-            <a:fillRect/>
-          </a:stretch>
-        </p:blipFill>
-        <p:spPr>
-          <a:xfrm>
-            <a:off x="7644289" y="5035673"/>
+            <a:off x="7294195" y="4641154"/>
             <a:ext cx="928696" cy="581711"/>
           </a:xfrm>
           <a:prstGeom prst="rect">
@@ -16495,8 +16751,8 @@
         </p:nvSpPr>
         <p:spPr>
           <a:xfrm>
-            <a:off x="6685722" y="5884718"/>
-            <a:ext cx="5082208" cy="954107"/>
+            <a:off x="6811449" y="5470732"/>
+            <a:ext cx="5082208" cy="1169551"/>
           </a:xfrm>
           <a:prstGeom prst="rect">
             <a:avLst/>
@@ -16514,7 +16770,44 @@
                 <a:latin typeface="Calibri"/>
                 <a:cs typeface="Calibri"/>
               </a:rPr>
-              <a:t>For example, if we want confidence 95% (Z=1.9599), then </a:t>
+              <a:t>For example, if we want confidence 95% (Z=1.9599), then</a:t>
+            </a:r>
+          </a:p>
+          <a:p>
+            <a:r>
+              <a:rPr lang="en-US" dirty="0">
+                <a:latin typeface="Calibri"/>
+                <a:cs typeface="Calibri"/>
+              </a:rPr>
+              <a:t>Z</a:t>
+            </a:r>
+            <a:r>
+              <a:rPr lang="en-US" baseline="30000" dirty="0">
+                <a:latin typeface="Calibri"/>
+                <a:cs typeface="Calibri"/>
+              </a:rPr>
+              <a:t>2</a:t>
+            </a:r>
+            <a:r>
+              <a:rPr lang="en-US" dirty="0">
+                <a:latin typeface="Calibri"/>
+                <a:cs typeface="Calibri"/>
+              </a:rPr>
+              <a:t>/4 = (1.9599)</a:t>
+            </a:r>
+            <a:r>
+              <a:rPr lang="en-US" baseline="30000" dirty="0">
+                <a:latin typeface="Calibri"/>
+                <a:cs typeface="Calibri"/>
+              </a:rPr>
+              <a:t>2</a:t>
+            </a:r>
+            <a:r>
+              <a:rPr lang="en-US" dirty="0">
+                <a:latin typeface="Calibri"/>
+                <a:cs typeface="Calibri"/>
+              </a:rPr>
+              <a:t> / 4 = 1 </a:t>
             </a:r>
           </a:p>
           <a:p>
@@ -16527,7 +16820,21 @@
                 <a:latin typeface="Calibri"/>
                 <a:cs typeface="Calibri"/>
               </a:rPr>
-              <a:t>for E=0.5   we need n = (1.9599)**2 / (4*0.5**2)   = 4 flips  </a:t>
+              <a:t>for E=0.5   we need n = 1 / 0.5</a:t>
+            </a:r>
+            <a:r>
+              <a:rPr lang="en-US" baseline="30000" dirty="0">
+                <a:latin typeface="Calibri"/>
+                <a:cs typeface="Calibri"/>
+              </a:rPr>
+              <a:t>2</a:t>
+            </a:r>
+            <a:r>
+              <a:rPr lang="en-US" dirty="0">
+                <a:latin typeface="Calibri"/>
+                <a:cs typeface="Calibri"/>
+              </a:rPr>
+              <a:t>  = 4 flips  </a:t>
             </a:r>
           </a:p>
           <a:p>
@@ -16540,7 +16847,21 @@
                 <a:latin typeface="Calibri"/>
                 <a:cs typeface="Calibri"/>
               </a:rPr>
-              <a:t>for E=0.25 we need n = (1.9599)**2 / (4*0.25**2) = 16 flips  </a:t>
+              <a:t>for E=0.25 we need n = 1 / 0.25</a:t>
+            </a:r>
+            <a:r>
+              <a:rPr lang="en-US" baseline="30000" dirty="0">
+                <a:latin typeface="Calibri"/>
+                <a:cs typeface="Calibri"/>
+              </a:rPr>
+              <a:t>2</a:t>
+            </a:r>
+            <a:r>
+              <a:rPr lang="en-US" dirty="0">
+                <a:latin typeface="Calibri"/>
+                <a:cs typeface="Calibri"/>
+              </a:rPr>
+              <a:t> = 16 flips  </a:t>
             </a:r>
           </a:p>
           <a:p>
@@ -16553,7 +16874,21 @@
                 <a:latin typeface="Calibri"/>
                 <a:cs typeface="Calibri"/>
               </a:rPr>
-              <a:t>for E=0.01, we need n = (1.9599)**2 /(4*0.01**2) = 9,603 flips</a:t>
+              <a:t>for E=0.01 we need n = 1 / 0.01</a:t>
+            </a:r>
+            <a:r>
+              <a:rPr lang="en-US" baseline="30000" dirty="0">
+                <a:latin typeface="Calibri"/>
+                <a:cs typeface="Calibri"/>
+              </a:rPr>
+              <a:t>2</a:t>
+            </a:r>
+            <a:r>
+              <a:rPr lang="en-US" dirty="0">
+                <a:latin typeface="Calibri"/>
+                <a:cs typeface="Calibri"/>
+              </a:rPr>
+              <a:t> = 9,603 flips</a:t>
             </a:r>
           </a:p>
         </p:txBody>
@@ -16573,7 +16908,7 @@
           <p:nvPr/>
         </p:nvPicPr>
         <p:blipFill rotWithShape="1">
-          <a:blip r:embed="rId8" cstate="email">
+          <a:blip r:embed="rId7" cstate="email">
             <a:extLst>
               <a:ext uri="{28A0092B-C50C-407E-A947-70E740481C1C}">
                 <a14:useLocalDpi xmlns:a14="http://schemas.microsoft.com/office/drawing/2010/main"/>
@@ -19047,7 +19382,7 @@
         <p:spPr>
           <a:xfrm>
             <a:off x="122583" y="129208"/>
-            <a:ext cx="6172200" cy="5179771"/>
+            <a:ext cx="6172200" cy="5900889"/>
           </a:xfrm>
           <a:prstGeom prst="rect">
             <a:avLst/>
@@ -19128,7 +19463,7 @@
               </a:rPr>
             </a:br>
             <a:r>
-              <a:rPr lang="en-US" sz="1300" b="1" u="sng" dirty="0">
+              <a:rPr lang="en-US" b="1" u="sng" dirty="0">
                 <a:latin typeface="Calibri"/>
                 <a:ea typeface="Calibri"/>
                 <a:cs typeface="Calibri"/>
@@ -19136,7 +19471,7 @@
               </a:rPr>
               <a:t>Problem:</a:t>
             </a:r>
-            <a:endParaRPr sz="1300" b="1" u="sng" dirty="0">
+            <a:endParaRPr b="1" u="sng" dirty="0">
               <a:latin typeface="Calibri"/>
               <a:ea typeface="Calibri"/>
               <a:cs typeface="Calibri"/>
@@ -19154,7 +19489,7 @@
               <a:buNone/>
             </a:pPr>
             <a:r>
-              <a:rPr lang="en-US" sz="1300" dirty="0">
+              <a:rPr lang="en-US" dirty="0">
                 <a:latin typeface="Calibri"/>
                 <a:ea typeface="Calibri"/>
                 <a:cs typeface="Calibri"/>
@@ -19174,7 +19509,7 @@
               <a:buNone/>
             </a:pPr>
             <a:r>
-              <a:rPr lang="en-US" sz="1300" dirty="0">
+              <a:rPr lang="en-US" dirty="0">
                 <a:latin typeface="Calibri"/>
                 <a:ea typeface="Calibri"/>
                 <a:cs typeface="Calibri"/>
@@ -19194,7 +19529,7 @@
               <a:buNone/>
             </a:pPr>
             <a:r>
-              <a:rPr lang="en-US" sz="1300" dirty="0">
+              <a:rPr lang="en-US" dirty="0">
                 <a:latin typeface="Calibri"/>
                 <a:ea typeface="Calibri"/>
                 <a:cs typeface="Calibri"/>
@@ -19213,7 +19548,7 @@
               </a:spcAft>
               <a:buNone/>
             </a:pPr>
-            <a:endParaRPr lang="en-US" sz="1300" dirty="0">
+            <a:endParaRPr lang="en-US" dirty="0">
               <a:latin typeface="Calibri"/>
               <a:ea typeface="Calibri"/>
               <a:cs typeface="Calibri"/>
@@ -19231,7 +19566,7 @@
               <a:buNone/>
             </a:pPr>
             <a:r>
-              <a:rPr lang="en-US" sz="1300" dirty="0">
+              <a:rPr lang="en-US" dirty="0">
                 <a:latin typeface="Calibri"/>
                 <a:ea typeface="Calibri"/>
                 <a:cs typeface="Calibri"/>
@@ -19250,7 +19585,7 @@
               </a:spcAft>
               <a:buNone/>
             </a:pPr>
-            <a:endParaRPr lang="en-US" sz="1300" dirty="0">
+            <a:endParaRPr lang="en-US" dirty="0">
               <a:latin typeface="Calibri"/>
               <a:ea typeface="Calibri"/>
               <a:cs typeface="Calibri"/>
@@ -19260,7 +19595,7 @@
           <a:p>
             <a:pPr lvl="0"/>
             <a:r>
-              <a:rPr lang="en-US" sz="1300" dirty="0">
+              <a:rPr lang="en-US" dirty="0">
                 <a:latin typeface="Calibri"/>
                 <a:ea typeface="Calibri"/>
                 <a:cs typeface="Calibri"/>
@@ -19308,7 +19643,7 @@
               <a:t> </a:t>
             </a:r>
             <a:r>
-              <a:rPr lang="en-US" sz="1300" dirty="0">
+              <a:rPr lang="en-US" dirty="0">
                 <a:latin typeface="Calibri"/>
                 <a:cs typeface="Calibri"/>
                 <a:sym typeface="Calibri"/>
@@ -19318,7 +19653,7 @@
           </a:p>
           <a:p>
             <a:pPr lvl="0"/>
-            <a:endParaRPr lang="en-US" sz="1300" dirty="0">
+            <a:endParaRPr lang="en-US" dirty="0">
               <a:latin typeface="Calibri"/>
               <a:ea typeface="Calibri"/>
               <a:cs typeface="Calibri"/>
@@ -19328,7 +19663,7 @@
           <a:p>
             <a:pPr lvl="0"/>
             <a:r>
-              <a:rPr lang="en-US" sz="1300" dirty="0">
+              <a:rPr lang="en-US" dirty="0">
                 <a:latin typeface="Calibri"/>
                 <a:ea typeface="Calibri"/>
                 <a:cs typeface="Calibri"/>
@@ -19337,7 +19672,7 @@
               <a:t>X</a:t>
             </a:r>
             <a:r>
-              <a:rPr lang="en-US" sz="1300" baseline="30000" dirty="0">
+              <a:rPr lang="en-US" baseline="30000" dirty="0">
                 <a:latin typeface="Calibri"/>
                 <a:ea typeface="Calibri"/>
                 <a:cs typeface="Calibri"/>
@@ -19346,7 +19681,7 @@
               <a:t>2</a:t>
             </a:r>
             <a:r>
-              <a:rPr lang="en-US" sz="1300" dirty="0">
+              <a:rPr lang="en-US" dirty="0">
                 <a:latin typeface="Calibri"/>
                 <a:ea typeface="Calibri"/>
                 <a:cs typeface="Calibri"/>
@@ -19355,7 +19690,7 @@
               <a:t> = sum( (observed – expected)</a:t>
             </a:r>
             <a:r>
-              <a:rPr lang="en-US" sz="1300" baseline="30000" dirty="0">
+              <a:rPr lang="en-US" baseline="30000" dirty="0">
                 <a:latin typeface="Calibri"/>
                 <a:ea typeface="Calibri"/>
                 <a:cs typeface="Calibri"/>
@@ -19364,7 +19699,7 @@
               <a:t>2</a:t>
             </a:r>
             <a:r>
-              <a:rPr lang="en-US" sz="1300" dirty="0">
+              <a:rPr lang="en-US" dirty="0">
                 <a:latin typeface="Calibri"/>
                 <a:ea typeface="Calibri"/>
                 <a:cs typeface="Calibri"/>
@@ -19373,7 +19708,7 @@
               <a:t>/expected) = [ (H– N/2)</a:t>
             </a:r>
             <a:r>
-              <a:rPr lang="en-US" sz="1300" baseline="30000" dirty="0">
+              <a:rPr lang="en-US" baseline="30000" dirty="0">
                 <a:latin typeface="Calibri"/>
                 <a:ea typeface="Calibri"/>
                 <a:cs typeface="Calibri"/>
@@ -19382,7 +19717,7 @@
               <a:t>2</a:t>
             </a:r>
             <a:r>
-              <a:rPr lang="en-US" sz="1300" dirty="0">
+              <a:rPr lang="en-US" dirty="0">
                 <a:latin typeface="Calibri"/>
                 <a:ea typeface="Calibri"/>
                 <a:cs typeface="Calibri"/>
@@ -19391,7 +19726,7 @@
               <a:t> / (N/2) ] + [ (T – N/2)</a:t>
             </a:r>
             <a:r>
-              <a:rPr lang="en-US" sz="1300" baseline="30000" dirty="0">
+              <a:rPr lang="en-US" baseline="30000" dirty="0">
                 <a:latin typeface="Calibri"/>
                 <a:ea typeface="Calibri"/>
                 <a:cs typeface="Calibri"/>
@@ -19400,7 +19735,7 @@
               <a:t>2</a:t>
             </a:r>
             <a:r>
-              <a:rPr lang="en-US" sz="1300" dirty="0">
+              <a:rPr lang="en-US" dirty="0">
                 <a:latin typeface="Calibri"/>
                 <a:ea typeface="Calibri"/>
                 <a:cs typeface="Calibri"/>
@@ -19424,7 +19759,7 @@
               <a:buFont typeface="Arial"/>
               <a:buNone/>
             </a:pPr>
-            <a:endParaRPr sz="1300" dirty="0">
+            <a:endParaRPr dirty="0">
               <a:latin typeface="Calibri"/>
               <a:ea typeface="Calibri"/>
               <a:cs typeface="Calibri"/>
@@ -19447,7 +19782,7 @@
               <a:buNone/>
             </a:pPr>
             <a:r>
-              <a:rPr lang="en-US" sz="1300" dirty="0">
+              <a:rPr lang="en-US" dirty="0">
                 <a:latin typeface="Calibri"/>
                 <a:ea typeface="Calibri"/>
                 <a:cs typeface="Calibri"/>
@@ -19471,7 +19806,7 @@
               <a:buFont typeface="Arial"/>
               <a:buNone/>
             </a:pPr>
-            <a:endParaRPr lang="en-US" sz="1300" dirty="0">
+            <a:endParaRPr lang="en-US" dirty="0">
               <a:latin typeface="Calibri"/>
               <a:ea typeface="Calibri"/>
               <a:cs typeface="Calibri"/>
@@ -19494,7 +19829,7 @@
               <a:buNone/>
             </a:pPr>
             <a:r>
-              <a:rPr lang="en-US" sz="1300" dirty="0">
+              <a:rPr lang="en-US" dirty="0">
                 <a:latin typeface="Calibri"/>
                 <a:ea typeface="Calibri"/>
                 <a:cs typeface="Calibri"/>
@@ -19519,7 +19854,7 @@
               <a:buNone/>
             </a:pPr>
             <a:r>
-              <a:rPr lang="en-US" sz="1300" dirty="0">
+              <a:rPr lang="en-US" dirty="0">
                 <a:latin typeface="Calibri"/>
                 <a:ea typeface="Calibri"/>
                 <a:cs typeface="Calibri"/>
@@ -19543,7 +19878,7 @@
               <a:buFont typeface="Arial"/>
               <a:buNone/>
             </a:pPr>
-            <a:endParaRPr lang="en-US" sz="1300" dirty="0">
+            <a:endParaRPr lang="en-US" dirty="0">
               <a:latin typeface="Calibri"/>
               <a:ea typeface="Calibri"/>
               <a:cs typeface="Calibri"/>
@@ -19558,7 +19893,7 @@
               <a:buSzPts val="1100"/>
             </a:pPr>
             <a:r>
-              <a:rPr lang="en-US" sz="1300" dirty="0">
+              <a:rPr lang="en-US" dirty="0">
                 <a:latin typeface="Calibri"/>
                 <a:ea typeface="Calibri"/>
                 <a:cs typeface="Calibri"/>
@@ -19567,7 +19902,7 @@
               <a:t>X</a:t>
             </a:r>
             <a:r>
-              <a:rPr lang="en-US" sz="1300" baseline="30000" dirty="0">
+              <a:rPr lang="en-US" baseline="30000" dirty="0">
                 <a:latin typeface="Calibri"/>
                 <a:ea typeface="Calibri"/>
                 <a:cs typeface="Calibri"/>
@@ -19576,7 +19911,7 @@
               <a:t>2</a:t>
             </a:r>
             <a:r>
-              <a:rPr lang="en-US" sz="1300" dirty="0">
+              <a:rPr lang="en-US" dirty="0">
                 <a:latin typeface="Calibri"/>
                 <a:ea typeface="Calibri"/>
                 <a:cs typeface="Calibri"/>
@@ -19585,7 +19920,7 @@
               <a:t> = [ (60– 50)</a:t>
             </a:r>
             <a:r>
-              <a:rPr lang="en-US" sz="1300" baseline="30000" dirty="0">
+              <a:rPr lang="en-US" baseline="30000" dirty="0">
                 <a:latin typeface="Calibri"/>
                 <a:ea typeface="Calibri"/>
                 <a:cs typeface="Calibri"/>
@@ -19594,7 +19929,7 @@
               <a:t>2</a:t>
             </a:r>
             <a:r>
-              <a:rPr lang="en-US" sz="1300" dirty="0">
+              <a:rPr lang="en-US" dirty="0">
                 <a:latin typeface="Calibri"/>
                 <a:ea typeface="Calibri"/>
                 <a:cs typeface="Calibri"/>
@@ -19603,7 +19938,7 @@
               <a:t> / 50 ] + [ (40 – 50)</a:t>
             </a:r>
             <a:r>
-              <a:rPr lang="en-US" sz="1300" baseline="30000" dirty="0">
+              <a:rPr lang="en-US" baseline="30000" dirty="0">
                 <a:latin typeface="Calibri"/>
                 <a:ea typeface="Calibri"/>
                 <a:cs typeface="Calibri"/>
@@ -19612,7 +19947,7 @@
               <a:t>2</a:t>
             </a:r>
             <a:r>
-              <a:rPr lang="en-US" sz="1300" dirty="0">
+              <a:rPr lang="en-US" dirty="0">
                 <a:latin typeface="Calibri"/>
                 <a:ea typeface="Calibri"/>
                 <a:cs typeface="Calibri"/>
@@ -19621,7 +19956,7 @@
               <a:t> / 50 ] = 10</a:t>
             </a:r>
             <a:r>
-              <a:rPr lang="en-US" sz="1300" baseline="30000" dirty="0">
+              <a:rPr lang="en-US" baseline="30000" dirty="0">
                 <a:latin typeface="Calibri"/>
                 <a:ea typeface="Calibri"/>
                 <a:cs typeface="Calibri"/>
@@ -19630,7 +19965,7 @@
               <a:t>2</a:t>
             </a:r>
             <a:r>
-              <a:rPr lang="en-US" sz="1300" dirty="0">
+              <a:rPr lang="en-US" dirty="0">
                 <a:latin typeface="Calibri"/>
                 <a:ea typeface="Calibri"/>
                 <a:cs typeface="Calibri"/>
@@ -19639,7 +19974,7 @@
               <a:t> / 50  + 10</a:t>
             </a:r>
             <a:r>
-              <a:rPr lang="en-US" sz="1300" baseline="30000" dirty="0">
+              <a:rPr lang="en-US" baseline="30000" dirty="0">
                 <a:latin typeface="Calibri"/>
                 <a:ea typeface="Calibri"/>
                 <a:cs typeface="Calibri"/>
@@ -19648,7 +19983,7 @@
               <a:t>2</a:t>
             </a:r>
             <a:r>
-              <a:rPr lang="en-US" sz="1300" dirty="0">
+              <a:rPr lang="en-US" dirty="0">
                 <a:latin typeface="Calibri"/>
                 <a:ea typeface="Calibri"/>
                 <a:cs typeface="Calibri"/>
@@ -19664,7 +19999,7 @@
               </a:buClr>
               <a:buSzPts val="1100"/>
             </a:pPr>
-            <a:endParaRPr lang="en-US" sz="1300" dirty="0">
+            <a:endParaRPr lang="en-US" dirty="0">
               <a:latin typeface="Calibri"/>
               <a:ea typeface="Calibri"/>
               <a:cs typeface="Calibri"/>
@@ -19679,7 +20014,7 @@
               <a:buSzPts val="1100"/>
             </a:pPr>
             <a:r>
-              <a:rPr lang="en-US" sz="1300" dirty="0">
+              <a:rPr lang="en-US" dirty="0">
                 <a:latin typeface="Calibri"/>
                 <a:ea typeface="Calibri"/>
                 <a:cs typeface="Calibri"/>
@@ -19688,7 +20023,7 @@
               <a:t>X</a:t>
             </a:r>
             <a:r>
-              <a:rPr lang="en-US" sz="1300" baseline="30000" dirty="0">
+              <a:rPr lang="en-US" baseline="30000" dirty="0">
                 <a:latin typeface="Calibri"/>
                 <a:ea typeface="Calibri"/>
                 <a:cs typeface="Calibri"/>
@@ -19697,7 +20032,7 @@
               <a:t>2</a:t>
             </a:r>
             <a:r>
-              <a:rPr lang="en-US" sz="1300" dirty="0">
+              <a:rPr lang="en-US" dirty="0">
                 <a:latin typeface="Calibri"/>
                 <a:ea typeface="Calibri"/>
                 <a:cs typeface="Calibri"/>
@@ -19714,7 +20049,7 @@
               <a:buSzPts val="1100"/>
             </a:pPr>
             <a:r>
-              <a:rPr lang="en-US" sz="1300" dirty="0">
+              <a:rPr lang="en-US" dirty="0">
                 <a:latin typeface="Calibri"/>
                 <a:ea typeface="Calibri"/>
                 <a:cs typeface="Calibri"/>
@@ -19731,7 +20066,7 @@
               <a:buSzPts val="1100"/>
             </a:pPr>
             <a:r>
-              <a:rPr lang="en-US" sz="1300" dirty="0">
+              <a:rPr lang="en-US" dirty="0">
                 <a:latin typeface="Calibri"/>
                 <a:ea typeface="Calibri"/>
                 <a:cs typeface="Calibri"/>
@@ -19966,8 +20301,8 @@
         </p:nvSpPr>
         <p:spPr>
           <a:xfrm>
-            <a:off x="0" y="57384"/>
-            <a:ext cx="5913120" cy="5606438"/>
+            <a:off x="0" y="57383"/>
+            <a:ext cx="5913120" cy="6800617"/>
           </a:xfrm>
           <a:prstGeom prst="rect">
             <a:avLst/>
@@ -20000,7 +20335,7 @@
                 <a:sym typeface="Calibri"/>
               </a:rPr>
             </a:br>
-            <a:endParaRPr lang="en-US" sz="1800" dirty="0">
+            <a:endParaRPr lang="en-US" sz="900" dirty="0">
               <a:latin typeface="Calibri"/>
               <a:ea typeface="Calibri"/>
               <a:cs typeface="Calibri"/>
@@ -20018,7 +20353,7 @@
             </a:r>
           </a:p>
           <a:p>
-            <a:endParaRPr lang="en-US" sz="1300" dirty="0">
+            <a:endParaRPr lang="en-US" sz="800" dirty="0">
               <a:latin typeface="Calibri"/>
               <a:cs typeface="Calibri"/>
               <a:sym typeface="Calibri"/>
@@ -20035,7 +20370,7 @@
             </a:r>
           </a:p>
           <a:p>
-            <a:endParaRPr lang="en-US" sz="1300" dirty="0">
+            <a:endParaRPr lang="en-US" sz="800" dirty="0">
               <a:latin typeface="Calibri"/>
               <a:cs typeface="Calibri"/>
               <a:sym typeface="Calibri"/>
@@ -20052,7 +20387,7 @@
             </a:r>
           </a:p>
           <a:p>
-            <a:endParaRPr lang="en-US" sz="1300" dirty="0">
+            <a:endParaRPr lang="en-US" sz="800" dirty="0">
               <a:latin typeface="Calibri"/>
               <a:cs typeface="Calibri"/>
               <a:sym typeface="Calibri"/>
@@ -20165,6 +20500,241 @@
               </a:spcAft>
               <a:buNone/>
             </a:pPr>
+            <a:endParaRPr lang="en-US" sz="800" dirty="0">
+              <a:latin typeface="Calibri"/>
+              <a:ea typeface="Calibri"/>
+              <a:cs typeface="Calibri"/>
+              <a:sym typeface="Calibri"/>
+            </a:endParaRPr>
+          </a:p>
+          <a:p>
+            <a:pPr marL="0" lvl="0" indent="0" algn="l" rtl="0">
+              <a:spcBef>
+                <a:spcPts val="0"/>
+              </a:spcBef>
+              <a:spcAft>
+                <a:spcPts val="0"/>
+              </a:spcAft>
+              <a:buNone/>
+            </a:pPr>
+            <a:r>
+              <a:rPr lang="en-US" sz="1300" dirty="0">
+                <a:latin typeface="Calibri"/>
+                <a:ea typeface="Calibri"/>
+                <a:cs typeface="Calibri"/>
+                <a:sym typeface="Calibri"/>
+              </a:rPr>
+              <a:t>To calculate t-test we assume values 1 for heads and -1 for tails.</a:t>
+            </a:r>
+          </a:p>
+          <a:p>
+            <a:pPr lvl="0"/>
+            <a:r>
+              <a:rPr lang="en-US" sz="1300" dirty="0">
+                <a:latin typeface="Calibri"/>
+                <a:ea typeface="Calibri"/>
+                <a:cs typeface="Calibri"/>
+                <a:sym typeface="Calibri"/>
+              </a:rPr>
+              <a:t>Then suppose N=100, H=60, T=40</a:t>
+            </a:r>
+          </a:p>
+          <a:p>
+            <a:pPr marL="0" lvl="0" indent="0" algn="l" rtl="0">
+              <a:spcBef>
+                <a:spcPts val="0"/>
+              </a:spcBef>
+              <a:spcAft>
+                <a:spcPts val="0"/>
+              </a:spcAft>
+              <a:buNone/>
+            </a:pPr>
+            <a:r>
+              <a:rPr lang="en-US" sz="1300" dirty="0">
+                <a:latin typeface="Calibri"/>
+                <a:ea typeface="Calibri"/>
+                <a:cs typeface="Calibri"/>
+                <a:sym typeface="Calibri"/>
+              </a:rPr>
+              <a:t>   Sample Mean X = (H – T)/100 = 20/100 = 0.2</a:t>
+            </a:r>
+          </a:p>
+          <a:p>
+            <a:pPr marL="0" lvl="0" indent="0" algn="l" rtl="0">
+              <a:spcBef>
+                <a:spcPts val="0"/>
+              </a:spcBef>
+              <a:spcAft>
+                <a:spcPts val="0"/>
+              </a:spcAft>
+              <a:buNone/>
+            </a:pPr>
+            <a:r>
+              <a:rPr lang="en-US" sz="1300" dirty="0">
+                <a:latin typeface="Calibri"/>
+                <a:ea typeface="Calibri"/>
+                <a:cs typeface="Calibri"/>
+                <a:sym typeface="Calibri"/>
+              </a:rPr>
+              <a:t>   Expected mean = N/2 – N/2 = 0</a:t>
+            </a:r>
+          </a:p>
+          <a:p>
+            <a:pPr marL="0" lvl="0" indent="0" algn="l" rtl="0">
+              <a:spcBef>
+                <a:spcPts val="0"/>
+              </a:spcBef>
+              <a:spcAft>
+                <a:spcPts val="0"/>
+              </a:spcAft>
+              <a:buNone/>
+            </a:pPr>
+            <a:r>
+              <a:rPr lang="en-US" sz="1300" dirty="0">
+                <a:latin typeface="Calibri"/>
+                <a:ea typeface="Calibri"/>
+                <a:cs typeface="Calibri"/>
+                <a:sym typeface="Calibri"/>
+              </a:rPr>
+              <a:t>   Degrees of Freedom = N-1 = 99</a:t>
+            </a:r>
+          </a:p>
+          <a:p>
+            <a:pPr marL="0" lvl="0" indent="0" algn="l" rtl="0">
+              <a:spcBef>
+                <a:spcPts val="0"/>
+              </a:spcBef>
+              <a:spcAft>
+                <a:spcPts val="0"/>
+              </a:spcAft>
+              <a:buNone/>
+            </a:pPr>
+            <a:r>
+              <a:rPr lang="en-US" sz="1300" dirty="0">
+                <a:latin typeface="Calibri"/>
+                <a:ea typeface="Calibri"/>
+                <a:cs typeface="Calibri"/>
+                <a:sym typeface="Calibri"/>
+              </a:rPr>
+              <a:t>   Sample Variance:</a:t>
+            </a:r>
+          </a:p>
+          <a:p>
+            <a:pPr lvl="0"/>
+            <a:r>
+              <a:rPr lang="en-US" sz="1300" dirty="0">
+                <a:latin typeface="Calibri"/>
+                <a:ea typeface="Calibri"/>
+                <a:cs typeface="Calibri"/>
+                <a:sym typeface="Calibri"/>
+              </a:rPr>
+              <a:t>         S</a:t>
+            </a:r>
+            <a:r>
+              <a:rPr lang="en-US" sz="1300" baseline="30000" dirty="0">
+                <a:latin typeface="Calibri"/>
+                <a:ea typeface="Calibri"/>
+                <a:cs typeface="Calibri"/>
+                <a:sym typeface="Calibri"/>
+              </a:rPr>
+              <a:t>2</a:t>
+            </a:r>
+            <a:r>
+              <a:rPr lang="en-US" sz="1300" dirty="0">
+                <a:latin typeface="Calibri"/>
+                <a:ea typeface="Calibri"/>
+                <a:cs typeface="Calibri"/>
+                <a:sym typeface="Calibri"/>
+              </a:rPr>
+              <a:t> = (1/99) *  ( 60*(1-0.2)</a:t>
+            </a:r>
+            <a:r>
+              <a:rPr lang="en-US" sz="1300" baseline="30000" dirty="0">
+                <a:latin typeface="Calibri"/>
+                <a:ea typeface="Calibri"/>
+                <a:cs typeface="Calibri"/>
+                <a:sym typeface="Calibri"/>
+              </a:rPr>
+              <a:t>2</a:t>
+            </a:r>
+            <a:r>
+              <a:rPr lang="en-US" sz="1300" dirty="0">
+                <a:latin typeface="Calibri"/>
+                <a:ea typeface="Calibri"/>
+                <a:cs typeface="Calibri"/>
+                <a:sym typeface="Calibri"/>
+              </a:rPr>
+              <a:t> + 40*(-1-0.2)</a:t>
+            </a:r>
+            <a:r>
+              <a:rPr lang="en-US" sz="1300" baseline="30000" dirty="0">
+                <a:latin typeface="Calibri"/>
+                <a:ea typeface="Calibri"/>
+                <a:cs typeface="Calibri"/>
+                <a:sym typeface="Calibri"/>
+              </a:rPr>
+              <a:t>2</a:t>
+            </a:r>
+            <a:r>
+              <a:rPr lang="en-US" sz="1300" dirty="0">
+                <a:latin typeface="Calibri"/>
+                <a:ea typeface="Calibri"/>
+                <a:cs typeface="Calibri"/>
+                <a:sym typeface="Calibri"/>
+              </a:rPr>
+              <a:t> )  = 0.969</a:t>
+            </a:r>
+          </a:p>
+          <a:p>
+            <a:pPr lvl="0"/>
+            <a:r>
+              <a:rPr lang="en-US" sz="1300" dirty="0">
+                <a:latin typeface="Calibri"/>
+                <a:ea typeface="Calibri"/>
+                <a:cs typeface="Calibri"/>
+                <a:sym typeface="Calibri"/>
+              </a:rPr>
+              <a:t>   Sample Standard Deviation:</a:t>
+            </a:r>
+          </a:p>
+          <a:p>
+            <a:pPr lvl="0"/>
+            <a:r>
+              <a:rPr lang="en-US" sz="1300" dirty="0">
+                <a:latin typeface="Calibri"/>
+                <a:ea typeface="Calibri"/>
+                <a:cs typeface="Calibri"/>
+                <a:sym typeface="Calibri"/>
+              </a:rPr>
+              <a:t>        S = sqrt(0.9696) = 0.9847</a:t>
+            </a:r>
+          </a:p>
+          <a:p>
+            <a:pPr lvl="0"/>
+            <a:r>
+              <a:rPr lang="en-US" sz="1300" dirty="0">
+                <a:latin typeface="Calibri"/>
+                <a:ea typeface="Calibri"/>
+                <a:cs typeface="Calibri"/>
+                <a:sym typeface="Calibri"/>
+              </a:rPr>
+              <a:t>   t-statistics:</a:t>
+            </a:r>
+          </a:p>
+          <a:p>
+            <a:pPr lvl="0"/>
+            <a:r>
+              <a:rPr lang="en-US" sz="1300" dirty="0">
+                <a:latin typeface="Calibri"/>
+                <a:ea typeface="Calibri"/>
+                <a:cs typeface="Calibri"/>
+                <a:sym typeface="Calibri"/>
+              </a:rPr>
+              <a:t>        (0.2– 0) / (0.9847 / 10) = 2.031</a:t>
+            </a:r>
+          </a:p>
+          <a:p>
+            <a:pPr lvl="0"/>
             <a:endParaRPr lang="en-US" sz="1300" dirty="0">
               <a:latin typeface="Calibri"/>
               <a:ea typeface="Calibri"/>
@@ -20173,15 +20743,7 @@
             </a:endParaRPr>
           </a:p>
           <a:p>
-            <a:pPr marL="0" lvl="0" indent="0" algn="l" rtl="0">
-              <a:spcBef>
-                <a:spcPts val="0"/>
-              </a:spcBef>
-              <a:spcAft>
-                <a:spcPts val="0"/>
-              </a:spcAft>
-              <a:buNone/>
-            </a:pPr>
+            <a:pPr lvl="0"/>
             <a:r>
               <a:rPr lang="en-US" sz="1300" dirty="0">
                 <a:latin typeface="Calibri"/>
@@ -20189,7 +20751,7 @@
                 <a:cs typeface="Calibri"/>
                 <a:sym typeface="Calibri"/>
               </a:rPr>
-              <a:t>To calculate t-test we assume values 1 for heads and -1 for tails.</a:t>
+              <a:t>Note: for two-sided t-test with 100 degrees of freedom and P-value 0.05</a:t>
             </a:r>
           </a:p>
           <a:p>
@@ -20201,19 +20763,11 @@
                 <a:cs typeface="Calibri"/>
                 <a:sym typeface="Calibri"/>
               </a:rPr>
-              <a:t>Then suppose N=100, H=60, T=40</a:t>
-            </a:r>
-          </a:p>
-          <a:p>
-            <a:pPr marL="0" lvl="0" indent="0" algn="l" rtl="0">
-              <a:spcBef>
-                <a:spcPts val="0"/>
-              </a:spcBef>
-              <a:spcAft>
-                <a:spcPts val="0"/>
-              </a:spcAft>
-              <a:buNone/>
-            </a:pPr>
+              <a:t>we have (from t-test table): 1.984</a:t>
+            </a:r>
+          </a:p>
+          <a:p>
+            <a:pPr lvl="0"/>
             <a:r>
               <a:rPr lang="en-US" sz="1300" dirty="0">
                 <a:latin typeface="Calibri"/>
@@ -20221,19 +20775,20 @@
                 <a:cs typeface="Calibri"/>
                 <a:sym typeface="Calibri"/>
               </a:rPr>
-              <a:t>   Sample Mean X = (H – T)/100 = 20/100 = 0.2</a:t>
-            </a:r>
-          </a:p>
-          <a:p>
-            <a:pPr marL="0" lvl="0" indent="0" algn="l" rtl="0">
-              <a:spcBef>
-                <a:spcPts val="0"/>
-              </a:spcBef>
-              <a:spcAft>
-                <a:spcPts val="0"/>
-              </a:spcAft>
-              <a:buNone/>
-            </a:pPr>
+              <a:t>Our t-statistics is 2.031, it is more extreme, so we reject the null hypothesis</a:t>
+            </a:r>
+          </a:p>
+          <a:p>
+            <a:pPr lvl="0"/>
+            <a:endParaRPr lang="en-US" sz="1300" dirty="0">
+              <a:latin typeface="Calibri"/>
+              <a:ea typeface="Calibri"/>
+              <a:cs typeface="Calibri"/>
+              <a:sym typeface="Calibri"/>
+            </a:endParaRPr>
+          </a:p>
+          <a:p>
+            <a:pPr lvl="0"/>
             <a:r>
               <a:rPr lang="en-US" sz="1300" dirty="0">
                 <a:latin typeface="Calibri"/>
@@ -20241,142 +20796,116 @@
                 <a:cs typeface="Calibri"/>
                 <a:sym typeface="Calibri"/>
               </a:rPr>
-              <a:t>   Expected mean = N/2 – N/2 = 0</a:t>
-            </a:r>
-          </a:p>
-          <a:p>
-            <a:pPr marL="0" lvl="0" indent="0" algn="l" rtl="0">
-              <a:spcBef>
-                <a:spcPts val="0"/>
-              </a:spcBef>
-              <a:spcAft>
-                <a:spcPts val="0"/>
-              </a:spcAft>
-              <a:buNone/>
-            </a:pPr>
-            <a:r>
-              <a:rPr lang="en-US" sz="1300" dirty="0">
-                <a:latin typeface="Calibri"/>
-                <a:ea typeface="Calibri"/>
-                <a:cs typeface="Calibri"/>
-                <a:sym typeface="Calibri"/>
-              </a:rPr>
-              <a:t>   Sample Variance:</a:t>
+              <a:t>In Python:</a:t>
             </a:r>
           </a:p>
           <a:p>
             <a:pPr lvl="0"/>
             <a:r>
-              <a:rPr lang="en-US" sz="1300" dirty="0">
-                <a:latin typeface="Calibri"/>
-                <a:ea typeface="Calibri"/>
-                <a:cs typeface="Calibri"/>
-                <a:sym typeface="Calibri"/>
-              </a:rPr>
-              <a:t>         S</a:t>
-            </a:r>
-            <a:r>
-              <a:rPr lang="en-US" sz="1300" baseline="30000" dirty="0">
-                <a:latin typeface="Calibri"/>
-                <a:ea typeface="Calibri"/>
-                <a:cs typeface="Calibri"/>
-                <a:sym typeface="Calibri"/>
-              </a:rPr>
-              <a:t>2</a:t>
-            </a:r>
-            <a:r>
-              <a:rPr lang="en-US" sz="1300" dirty="0">
-                <a:latin typeface="Calibri"/>
-                <a:ea typeface="Calibri"/>
-                <a:cs typeface="Calibri"/>
-                <a:sym typeface="Calibri"/>
-              </a:rPr>
-              <a:t> = (1/99) *  ( 60*(1-0.2)</a:t>
-            </a:r>
-            <a:r>
-              <a:rPr lang="en-US" sz="1300" baseline="30000" dirty="0">
-                <a:latin typeface="Calibri"/>
-                <a:ea typeface="Calibri"/>
-                <a:cs typeface="Calibri"/>
-                <a:sym typeface="Calibri"/>
-              </a:rPr>
-              <a:t>2</a:t>
-            </a:r>
-            <a:r>
-              <a:rPr lang="en-US" sz="1300" dirty="0">
-                <a:latin typeface="Calibri"/>
-                <a:ea typeface="Calibri"/>
-                <a:cs typeface="Calibri"/>
-                <a:sym typeface="Calibri"/>
-              </a:rPr>
-              <a:t> + 40*(-1-0.2)</a:t>
-            </a:r>
-            <a:r>
-              <a:rPr lang="en-US" sz="1300" baseline="30000" dirty="0">
-                <a:latin typeface="Calibri"/>
-                <a:ea typeface="Calibri"/>
-                <a:cs typeface="Calibri"/>
-                <a:sym typeface="Calibri"/>
-              </a:rPr>
-              <a:t>2</a:t>
-            </a:r>
-            <a:r>
-              <a:rPr lang="en-US" sz="1300" dirty="0">
-                <a:latin typeface="Calibri"/>
-                <a:ea typeface="Calibri"/>
-                <a:cs typeface="Calibri"/>
-                <a:sym typeface="Calibri"/>
-              </a:rPr>
-              <a:t> )  = 0.969</a:t>
+              <a:rPr lang="en-US" sz="1100" dirty="0">
+                <a:solidFill>
+                  <a:srgbClr val="0070C0"/>
+                </a:solidFill>
+                <a:latin typeface="Menlo" panose="020B0609030804020204" pitchFamily="49" charset="0"/>
+                <a:ea typeface="Menlo" panose="020B0609030804020204" pitchFamily="49" charset="0"/>
+                <a:cs typeface="Menlo" panose="020B0609030804020204" pitchFamily="49" charset="0"/>
+                <a:sym typeface="Calibri"/>
+              </a:rPr>
+              <a:t>     from </a:t>
+            </a:r>
+            <a:r>
+              <a:rPr lang="en-US" sz="1100" dirty="0" err="1">
+                <a:solidFill>
+                  <a:srgbClr val="0070C0"/>
+                </a:solidFill>
+                <a:latin typeface="Menlo" panose="020B0609030804020204" pitchFamily="49" charset="0"/>
+                <a:ea typeface="Menlo" panose="020B0609030804020204" pitchFamily="49" charset="0"/>
+                <a:cs typeface="Menlo" panose="020B0609030804020204" pitchFamily="49" charset="0"/>
+                <a:sym typeface="Calibri"/>
+              </a:rPr>
+              <a:t>scipy</a:t>
+            </a:r>
+            <a:r>
+              <a:rPr lang="en-US" sz="1100" dirty="0">
+                <a:solidFill>
+                  <a:srgbClr val="0070C0"/>
+                </a:solidFill>
+                <a:latin typeface="Menlo" panose="020B0609030804020204" pitchFamily="49" charset="0"/>
+                <a:ea typeface="Menlo" panose="020B0609030804020204" pitchFamily="49" charset="0"/>
+                <a:cs typeface="Menlo" panose="020B0609030804020204" pitchFamily="49" charset="0"/>
+                <a:sym typeface="Calibri"/>
+              </a:rPr>
+              <a:t> import stats</a:t>
             </a:r>
           </a:p>
           <a:p>
             <a:pPr lvl="0"/>
             <a:r>
-              <a:rPr lang="en-US" sz="1300" dirty="0">
-                <a:latin typeface="Calibri"/>
-                <a:ea typeface="Calibri"/>
-                <a:cs typeface="Calibri"/>
-                <a:sym typeface="Calibri"/>
-              </a:rPr>
-              <a:t>   Sample Standard Deviation:</a:t>
+              <a:rPr lang="en-US" sz="1100" dirty="0">
+                <a:solidFill>
+                  <a:srgbClr val="0070C0"/>
+                </a:solidFill>
+                <a:latin typeface="Menlo" panose="020B0609030804020204" pitchFamily="49" charset="0"/>
+                <a:ea typeface="Menlo" panose="020B0609030804020204" pitchFamily="49" charset="0"/>
+                <a:cs typeface="Menlo" panose="020B0609030804020204" pitchFamily="49" charset="0"/>
+                <a:sym typeface="Calibri"/>
+              </a:rPr>
+              <a:t>     </a:t>
+            </a:r>
+            <a:r>
+              <a:rPr lang="en-US" sz="1100" dirty="0" err="1">
+                <a:solidFill>
+                  <a:srgbClr val="0070C0"/>
+                </a:solidFill>
+                <a:latin typeface="Menlo" panose="020B0609030804020204" pitchFamily="49" charset="0"/>
+                <a:ea typeface="Menlo" panose="020B0609030804020204" pitchFamily="49" charset="0"/>
+                <a:cs typeface="Menlo" panose="020B0609030804020204" pitchFamily="49" charset="0"/>
+                <a:sym typeface="Calibri"/>
+              </a:rPr>
+              <a:t>stats.t.cdf</a:t>
+            </a:r>
+            <a:r>
+              <a:rPr lang="en-US" sz="1100" dirty="0">
+                <a:solidFill>
+                  <a:srgbClr val="0070C0"/>
+                </a:solidFill>
+                <a:latin typeface="Menlo" panose="020B0609030804020204" pitchFamily="49" charset="0"/>
+                <a:ea typeface="Menlo" panose="020B0609030804020204" pitchFamily="49" charset="0"/>
+                <a:cs typeface="Menlo" panose="020B0609030804020204" pitchFamily="49" charset="0"/>
+                <a:sym typeface="Calibri"/>
+              </a:rPr>
+              <a:t>(2.031,df=99)    </a:t>
+            </a:r>
+            <a:r>
+              <a:rPr lang="en-US" sz="1100" dirty="0">
+                <a:solidFill>
+                  <a:srgbClr val="00B050"/>
+                </a:solidFill>
+                <a:latin typeface="Menlo" panose="020B0609030804020204" pitchFamily="49" charset="0"/>
+                <a:ea typeface="Menlo" panose="020B0609030804020204" pitchFamily="49" charset="0"/>
+                <a:cs typeface="Menlo" panose="020B0609030804020204" pitchFamily="49" charset="0"/>
+                <a:sym typeface="Calibri"/>
+              </a:rPr>
+              <a:t># 0.9775 , more extreme than 0.95</a:t>
             </a:r>
           </a:p>
           <a:p>
             <a:pPr lvl="0"/>
-            <a:r>
-              <a:rPr lang="en-US" sz="1300" dirty="0">
-                <a:latin typeface="Calibri"/>
-                <a:ea typeface="Calibri"/>
-                <a:cs typeface="Calibri"/>
-                <a:sym typeface="Calibri"/>
-              </a:rPr>
-              <a:t>        S = sqrt(0.9696) = 0.9847</a:t>
-            </a:r>
+            <a:endParaRPr lang="en-US" sz="1300" dirty="0">
+              <a:latin typeface="Calibri"/>
+              <a:ea typeface="Calibri"/>
+              <a:cs typeface="Calibri"/>
+              <a:sym typeface="Calibri"/>
+            </a:endParaRPr>
           </a:p>
           <a:p>
             <a:pPr lvl="0"/>
-            <a:r>
-              <a:rPr lang="en-US" sz="1300" dirty="0">
-                <a:latin typeface="Calibri"/>
-                <a:ea typeface="Calibri"/>
-                <a:cs typeface="Calibri"/>
-                <a:sym typeface="Calibri"/>
-              </a:rPr>
-              <a:t>   t-statistics:</a:t>
-            </a:r>
-          </a:p>
-          <a:p>
-            <a:pPr lvl="0"/>
-            <a:r>
-              <a:rPr lang="en-US" sz="1300" dirty="0">
-                <a:latin typeface="Calibri"/>
-                <a:ea typeface="Calibri"/>
-                <a:cs typeface="Calibri"/>
-                <a:sym typeface="Calibri"/>
-              </a:rPr>
-              <a:t>        (0.2– 0) / (0.9847 / 10) = 2.031</a:t>
-            </a:r>
+            <a:endParaRPr lang="en-US" sz="1300" dirty="0">
+              <a:latin typeface="Calibri"/>
+              <a:ea typeface="Calibri"/>
+              <a:cs typeface="Calibri"/>
+              <a:sym typeface="Calibri"/>
+            </a:endParaRPr>
           </a:p>
           <a:p>
             <a:pPr lvl="0"/>

--- a/statistics_02_binomial_distribution.pptx
+++ b/statistics_02_binomial_distribution.pptx
@@ -5,16 +5,17 @@
     <p:sldMasterId id="2147483659" r:id="rId1"/>
   </p:sldMasterIdLst>
   <p:notesMasterIdLst>
-    <p:notesMasterId r:id="rId9"/>
+    <p:notesMasterId r:id="rId10"/>
   </p:notesMasterIdLst>
   <p:sldIdLst>
     <p:sldId id="266" r:id="rId2"/>
-    <p:sldId id="295" r:id="rId3"/>
-    <p:sldId id="259" r:id="rId4"/>
-    <p:sldId id="317" r:id="rId5"/>
-    <p:sldId id="318" r:id="rId6"/>
-    <p:sldId id="314" r:id="rId7"/>
-    <p:sldId id="315" r:id="rId8"/>
+    <p:sldId id="319" r:id="rId3"/>
+    <p:sldId id="295" r:id="rId4"/>
+    <p:sldId id="259" r:id="rId5"/>
+    <p:sldId id="317" r:id="rId6"/>
+    <p:sldId id="318" r:id="rId7"/>
+    <p:sldId id="314" r:id="rId8"/>
+    <p:sldId id="315" r:id="rId9"/>
   </p:sldIdLst>
   <p:sldSz cx="12192000" cy="6858000"/>
   <p:notesSz cx="6858000" cy="9144000"/>
@@ -13947,6 +13948,473 @@
           <p:cNvPr id="4" name="TextBox 3">
             <a:extLst>
               <a:ext uri="{FF2B5EF4-FFF2-40B4-BE49-F238E27FC236}">
+                <a16:creationId xmlns:a16="http://schemas.microsoft.com/office/drawing/2014/main" id="{1EB5F268-965F-C142-A102-83C02389B555}"/>
+              </a:ext>
+            </a:extLst>
+          </p:cNvPr>
+          <p:cNvSpPr txBox="1"/>
+          <p:nvPr/>
+        </p:nvSpPr>
+        <p:spPr>
+          <a:xfrm>
+            <a:off x="201542" y="326957"/>
+            <a:ext cx="6340146" cy="4154984"/>
+          </a:xfrm>
+          <a:prstGeom prst="rect">
+            <a:avLst/>
+          </a:prstGeom>
+          <a:noFill/>
+        </p:spPr>
+        <p:txBody>
+          <a:bodyPr wrap="square" rtlCol="0">
+            <a:spAutoFit/>
+          </a:bodyPr>
+          <a:lstStyle/>
+          <a:p>
+            <a:r>
+              <a:rPr lang="en-US" sz="1800" b="1" dirty="0">
+                <a:solidFill>
+                  <a:srgbClr val="0070C0"/>
+                </a:solidFill>
+              </a:rPr>
+              <a:t>Bernoulli Distribution</a:t>
+            </a:r>
+          </a:p>
+          <a:p>
+            <a:r>
+              <a:rPr lang="en-US" dirty="0"/>
+              <a:t> - </a:t>
+            </a:r>
+            <a:r>
+              <a:rPr lang="en-US" dirty="0">
+                <a:hlinkClick r:id="rId2"/>
+              </a:rPr>
+              <a:t>https://en.wikipedia.org/wiki/Bernoulli_distribution</a:t>
+            </a:r>
+            <a:r>
+              <a:rPr lang="en-US" dirty="0"/>
+              <a:t> </a:t>
+            </a:r>
+          </a:p>
+          <a:p>
+            <a:endParaRPr lang="en-US" dirty="0"/>
+          </a:p>
+          <a:p>
+            <a:r>
+              <a:rPr lang="en-US" dirty="0"/>
+              <a:t>The Bernoulli distribution is a special case of the binomial distribution where a single trial is conducted.</a:t>
+            </a:r>
+          </a:p>
+          <a:p>
+            <a:endParaRPr lang="en-US" dirty="0"/>
+          </a:p>
+          <a:p>
+            <a:r>
+              <a:rPr lang="en-US" dirty="0"/>
+              <a:t>It is a discrete probability distribution of a random variable which takes the values 1/0 (or true/false  or yes/no)</a:t>
+            </a:r>
+          </a:p>
+          <a:p>
+            <a:r>
+              <a:rPr lang="en-US" dirty="0"/>
+              <a:t>with probabilities </a:t>
+            </a:r>
+            <a:r>
+              <a:rPr lang="en-US" b="1" dirty="0">
+                <a:solidFill>
+                  <a:srgbClr val="FF0000"/>
+                </a:solidFill>
+              </a:rPr>
+              <a:t>p</a:t>
+            </a:r>
+            <a:r>
+              <a:rPr lang="en-US" dirty="0"/>
+              <a:t> and </a:t>
+            </a:r>
+            <a:r>
+              <a:rPr lang="en-US" b="1" dirty="0">
+                <a:solidFill>
+                  <a:srgbClr val="FF0000"/>
+                </a:solidFill>
+              </a:rPr>
+              <a:t>(1-p)</a:t>
+            </a:r>
+          </a:p>
+          <a:p>
+            <a:endParaRPr lang="en-US" dirty="0"/>
+          </a:p>
+          <a:p>
+            <a:r>
+              <a:rPr lang="en-US" dirty="0">
+                <a:solidFill>
+                  <a:srgbClr val="0070C0"/>
+                </a:solidFill>
+                <a:latin typeface="Menlo" panose="020B0609030804020204" pitchFamily="49" charset="0"/>
+                <a:ea typeface="Menlo" panose="020B0609030804020204" pitchFamily="49" charset="0"/>
+                <a:cs typeface="Menlo" panose="020B0609030804020204" pitchFamily="49" charset="0"/>
+              </a:rPr>
+              <a:t>    </a:t>
+            </a:r>
+            <a:r>
+              <a:rPr lang="en-US" dirty="0" err="1">
+                <a:solidFill>
+                  <a:srgbClr val="0070C0"/>
+                </a:solidFill>
+                <a:latin typeface="Menlo" panose="020B0609030804020204" pitchFamily="49" charset="0"/>
+                <a:ea typeface="Menlo" panose="020B0609030804020204" pitchFamily="49" charset="0"/>
+                <a:cs typeface="Menlo" panose="020B0609030804020204" pitchFamily="49" charset="0"/>
+              </a:rPr>
+              <a:t>Pr</a:t>
+            </a:r>
+            <a:r>
+              <a:rPr lang="en-US" dirty="0">
+                <a:solidFill>
+                  <a:srgbClr val="0070C0"/>
+                </a:solidFill>
+                <a:latin typeface="Menlo" panose="020B0609030804020204" pitchFamily="49" charset="0"/>
+                <a:ea typeface="Menlo" panose="020B0609030804020204" pitchFamily="49" charset="0"/>
+                <a:cs typeface="Menlo" panose="020B0609030804020204" pitchFamily="49" charset="0"/>
+              </a:rPr>
+              <a:t>(X=1) = p</a:t>
+            </a:r>
+          </a:p>
+          <a:p>
+            <a:r>
+              <a:rPr lang="en-US" dirty="0">
+                <a:solidFill>
+                  <a:srgbClr val="0070C0"/>
+                </a:solidFill>
+                <a:latin typeface="Menlo" panose="020B0609030804020204" pitchFamily="49" charset="0"/>
+                <a:ea typeface="Menlo" panose="020B0609030804020204" pitchFamily="49" charset="0"/>
+                <a:cs typeface="Menlo" panose="020B0609030804020204" pitchFamily="49" charset="0"/>
+              </a:rPr>
+              <a:t>    </a:t>
+            </a:r>
+            <a:r>
+              <a:rPr lang="en-US" dirty="0" err="1">
+                <a:solidFill>
+                  <a:srgbClr val="0070C0"/>
+                </a:solidFill>
+                <a:latin typeface="Menlo" panose="020B0609030804020204" pitchFamily="49" charset="0"/>
+                <a:ea typeface="Menlo" panose="020B0609030804020204" pitchFamily="49" charset="0"/>
+                <a:cs typeface="Menlo" panose="020B0609030804020204" pitchFamily="49" charset="0"/>
+              </a:rPr>
+              <a:t>Pr</a:t>
+            </a:r>
+            <a:r>
+              <a:rPr lang="en-US" dirty="0">
+                <a:solidFill>
+                  <a:srgbClr val="0070C0"/>
+                </a:solidFill>
+                <a:latin typeface="Menlo" panose="020B0609030804020204" pitchFamily="49" charset="0"/>
+                <a:ea typeface="Menlo" panose="020B0609030804020204" pitchFamily="49" charset="0"/>
+                <a:cs typeface="Menlo" panose="020B0609030804020204" pitchFamily="49" charset="0"/>
+              </a:rPr>
+              <a:t>(X=0) = 1-p = q</a:t>
+            </a:r>
+          </a:p>
+          <a:p>
+            <a:endParaRPr lang="en-US" dirty="0">
+              <a:solidFill>
+                <a:srgbClr val="0070C0"/>
+              </a:solidFill>
+              <a:latin typeface="Menlo" panose="020B0609030804020204" pitchFamily="49" charset="0"/>
+              <a:ea typeface="Menlo" panose="020B0609030804020204" pitchFamily="49" charset="0"/>
+              <a:cs typeface="Menlo" panose="020B0609030804020204" pitchFamily="49" charset="0"/>
+            </a:endParaRPr>
+          </a:p>
+          <a:p>
+            <a:r>
+              <a:rPr lang="en-US" dirty="0">
+                <a:solidFill>
+                  <a:srgbClr val="0070C0"/>
+                </a:solidFill>
+                <a:latin typeface="Menlo" panose="020B0609030804020204" pitchFamily="49" charset="0"/>
+                <a:ea typeface="Menlo" panose="020B0609030804020204" pitchFamily="49" charset="0"/>
+                <a:cs typeface="Menlo" panose="020B0609030804020204" pitchFamily="49" charset="0"/>
+              </a:rPr>
+              <a:t>    Mean E[X] = 0*q + 1*p = p</a:t>
+            </a:r>
+          </a:p>
+          <a:p>
+            <a:r>
+              <a:rPr lang="en-US" dirty="0">
+                <a:solidFill>
+                  <a:srgbClr val="0070C0"/>
+                </a:solidFill>
+                <a:latin typeface="Menlo" panose="020B0609030804020204" pitchFamily="49" charset="0"/>
+                <a:ea typeface="Menlo" panose="020B0609030804020204" pitchFamily="49" charset="0"/>
+                <a:cs typeface="Menlo" panose="020B0609030804020204" pitchFamily="49" charset="0"/>
+              </a:rPr>
+              <a:t>    Variance var[X] = E[X</a:t>
+            </a:r>
+            <a:r>
+              <a:rPr lang="en-US" baseline="30000" dirty="0">
+                <a:solidFill>
+                  <a:srgbClr val="0070C0"/>
+                </a:solidFill>
+                <a:latin typeface="Menlo" panose="020B0609030804020204" pitchFamily="49" charset="0"/>
+                <a:ea typeface="Menlo" panose="020B0609030804020204" pitchFamily="49" charset="0"/>
+                <a:cs typeface="Menlo" panose="020B0609030804020204" pitchFamily="49" charset="0"/>
+              </a:rPr>
+              <a:t>2</a:t>
+            </a:r>
+            <a:r>
+              <a:rPr lang="en-US" dirty="0">
+                <a:solidFill>
+                  <a:srgbClr val="0070C0"/>
+                </a:solidFill>
+                <a:latin typeface="Menlo" panose="020B0609030804020204" pitchFamily="49" charset="0"/>
+                <a:ea typeface="Menlo" panose="020B0609030804020204" pitchFamily="49" charset="0"/>
+                <a:cs typeface="Menlo" panose="020B0609030804020204" pitchFamily="49" charset="0"/>
+              </a:rPr>
+              <a:t>]-E[X]</a:t>
+            </a:r>
+            <a:r>
+              <a:rPr lang="en-US" baseline="30000" dirty="0">
+                <a:solidFill>
+                  <a:srgbClr val="0070C0"/>
+                </a:solidFill>
+                <a:latin typeface="Menlo" panose="020B0609030804020204" pitchFamily="49" charset="0"/>
+                <a:ea typeface="Menlo" panose="020B0609030804020204" pitchFamily="49" charset="0"/>
+                <a:cs typeface="Menlo" panose="020B0609030804020204" pitchFamily="49" charset="0"/>
+              </a:rPr>
+              <a:t>2</a:t>
+            </a:r>
+            <a:r>
+              <a:rPr lang="en-US" dirty="0">
+                <a:solidFill>
+                  <a:srgbClr val="0070C0"/>
+                </a:solidFill>
+                <a:latin typeface="Menlo" panose="020B0609030804020204" pitchFamily="49" charset="0"/>
+                <a:ea typeface="Menlo" panose="020B0609030804020204" pitchFamily="49" charset="0"/>
+                <a:cs typeface="Menlo" panose="020B0609030804020204" pitchFamily="49" charset="0"/>
+              </a:rPr>
+              <a:t> = ... = </a:t>
+            </a:r>
+            <a:r>
+              <a:rPr lang="en-US" dirty="0" err="1">
+                <a:solidFill>
+                  <a:srgbClr val="0070C0"/>
+                </a:solidFill>
+                <a:latin typeface="Menlo" panose="020B0609030804020204" pitchFamily="49" charset="0"/>
+                <a:ea typeface="Menlo" panose="020B0609030804020204" pitchFamily="49" charset="0"/>
+                <a:cs typeface="Menlo" panose="020B0609030804020204" pitchFamily="49" charset="0"/>
+              </a:rPr>
+              <a:t>pq</a:t>
+            </a:r>
+            <a:endParaRPr lang="en-US" dirty="0">
+              <a:solidFill>
+                <a:srgbClr val="0070C0"/>
+              </a:solidFill>
+              <a:latin typeface="Menlo" panose="020B0609030804020204" pitchFamily="49" charset="0"/>
+              <a:ea typeface="Menlo" panose="020B0609030804020204" pitchFamily="49" charset="0"/>
+              <a:cs typeface="Menlo" panose="020B0609030804020204" pitchFamily="49" charset="0"/>
+            </a:endParaRPr>
+          </a:p>
+          <a:p>
+            <a:endParaRPr lang="en-US" dirty="0"/>
+          </a:p>
+          <a:p>
+            <a:r>
+              <a:rPr lang="en-US" dirty="0"/>
+              <a:t>Good introduction:</a:t>
+            </a:r>
+          </a:p>
+          <a:p>
+            <a:pPr marL="171450" indent="-171450">
+              <a:buFont typeface="Arial" panose="020B0604020202020204" pitchFamily="34" charset="0"/>
+              <a:buChar char="•"/>
+            </a:pPr>
+            <a:r>
+              <a:rPr lang="en-US" sz="1100" dirty="0">
+                <a:hlinkClick r:id="rId2"/>
+              </a:rPr>
+              <a:t>https://en.wikipedia.org/wiki/Bernoulli_distribution</a:t>
+            </a:r>
+            <a:r>
+              <a:rPr lang="en-US" sz="1100" dirty="0"/>
+              <a:t> </a:t>
+            </a:r>
+          </a:p>
+          <a:p>
+            <a:pPr marL="171450" indent="-171450">
+              <a:buFont typeface="Arial" panose="020B0604020202020204" pitchFamily="34" charset="0"/>
+              <a:buChar char="•"/>
+            </a:pPr>
+            <a:r>
+              <a:rPr lang="en-US" sz="1100" dirty="0">
+                <a:hlinkClick r:id="rId3"/>
+              </a:rPr>
+              <a:t>https://www.probabilitycourse.com/chapter3/3_1_5_special_discrete_distr.php</a:t>
+            </a:r>
+            <a:r>
+              <a:rPr lang="en-US" sz="1100" dirty="0"/>
+              <a:t> </a:t>
+            </a:r>
+          </a:p>
+        </p:txBody>
+      </p:sp>
+      <p:pic>
+        <p:nvPicPr>
+          <p:cNvPr id="9" name="Picture 8" descr="A painting of a person&#10;&#10;Description automatically generated with medium confidence">
+            <a:extLst>
+              <a:ext uri="{FF2B5EF4-FFF2-40B4-BE49-F238E27FC236}">
+                <a16:creationId xmlns:a16="http://schemas.microsoft.com/office/drawing/2014/main" id="{A228C64A-7DD5-AA49-9C18-C6A54C2AB327}"/>
+              </a:ext>
+            </a:extLst>
+          </p:cNvPr>
+          <p:cNvPicPr>
+            <a:picLocks noChangeAspect="1"/>
+          </p:cNvPicPr>
+          <p:nvPr/>
+        </p:nvPicPr>
+        <p:blipFill rotWithShape="1">
+          <a:blip r:embed="rId4" cstate="email">
+            <a:extLst>
+              <a:ext uri="{28A0092B-C50C-407E-A947-70E740481C1C}">
+                <a14:useLocalDpi xmlns:a14="http://schemas.microsoft.com/office/drawing/2010/main"/>
+              </a:ext>
+            </a:extLst>
+          </a:blip>
+          <a:srcRect/>
+          <a:stretch/>
+        </p:blipFill>
+        <p:spPr>
+          <a:xfrm>
+            <a:off x="10238576" y="170934"/>
+            <a:ext cx="1234696" cy="1310185"/>
+          </a:xfrm>
+          <a:prstGeom prst="rect">
+            <a:avLst/>
+          </a:prstGeom>
+        </p:spPr>
+      </p:pic>
+      <p:sp>
+        <p:nvSpPr>
+          <p:cNvPr id="10" name="TextBox 9">
+            <a:extLst>
+              <a:ext uri="{FF2B5EF4-FFF2-40B4-BE49-F238E27FC236}">
+                <a16:creationId xmlns:a16="http://schemas.microsoft.com/office/drawing/2014/main" id="{6213F9B7-5ECC-D24C-B65B-C89169246BE1}"/>
+              </a:ext>
+            </a:extLst>
+          </p:cNvPr>
+          <p:cNvSpPr txBox="1"/>
+          <p:nvPr/>
+        </p:nvSpPr>
+        <p:spPr>
+          <a:xfrm>
+            <a:off x="10086854" y="1489038"/>
+            <a:ext cx="1538139" cy="523220"/>
+          </a:xfrm>
+          <a:prstGeom prst="rect">
+            <a:avLst/>
+          </a:prstGeom>
+          <a:noFill/>
+        </p:spPr>
+        <p:txBody>
+          <a:bodyPr wrap="square" rtlCol="0">
+            <a:spAutoFit/>
+          </a:bodyPr>
+          <a:lstStyle/>
+          <a:p>
+            <a:pPr algn="ctr"/>
+            <a:r>
+              <a:rPr lang="en-US" dirty="0"/>
+              <a:t>Jacob Bernoulli </a:t>
+            </a:r>
+          </a:p>
+          <a:p>
+            <a:pPr algn="ctr"/>
+            <a:r>
+              <a:rPr lang="en-US" dirty="0"/>
+              <a:t>(1655 – 1705)</a:t>
+            </a:r>
+          </a:p>
+        </p:txBody>
+      </p:sp>
+      <p:pic>
+        <p:nvPicPr>
+          <p:cNvPr id="8" name="Picture 2" descr="Figure">
+            <a:extLst>
+              <a:ext uri="{FF2B5EF4-FFF2-40B4-BE49-F238E27FC236}">
+                <a16:creationId xmlns:a16="http://schemas.microsoft.com/office/drawing/2014/main" id="{A0E9DBBE-2EA4-424F-AC90-D23CCB2DA2DB}"/>
+              </a:ext>
+            </a:extLst>
+          </p:cNvPr>
+          <p:cNvPicPr>
+            <a:picLocks noChangeAspect="1" noChangeArrowheads="1"/>
+          </p:cNvPicPr>
+          <p:nvPr/>
+        </p:nvPicPr>
+        <p:blipFill>
+          <a:blip r:embed="rId5" cstate="email">
+            <a:extLst>
+              <a:ext uri="{28A0092B-C50C-407E-A947-70E740481C1C}">
+                <a14:useLocalDpi xmlns:a14="http://schemas.microsoft.com/office/drawing/2010/main"/>
+              </a:ext>
+            </a:extLst>
+          </a:blip>
+          <a:srcRect/>
+          <a:stretch>
+            <a:fillRect/>
+          </a:stretch>
+        </p:blipFill>
+        <p:spPr bwMode="auto">
+          <a:xfrm>
+            <a:off x="6541688" y="2666059"/>
+            <a:ext cx="4572000" cy="3429000"/>
+          </a:xfrm>
+          <a:prstGeom prst="rect">
+            <a:avLst/>
+          </a:prstGeom>
+          <a:noFill/>
+          <a:extLst>
+            <a:ext uri="{909E8E84-426E-40DD-AFC4-6F175D3DCCD1}">
+              <a14:hiddenFill xmlns:a14="http://schemas.microsoft.com/office/drawing/2010/main">
+                <a:solidFill>
+                  <a:srgbClr val="FFFFFF"/>
+                </a:solidFill>
+              </a14:hiddenFill>
+            </a:ext>
+          </a:extLst>
+        </p:spPr>
+      </p:pic>
+    </p:spTree>
+    <p:extLst>
+      <p:ext uri="{BB962C8B-B14F-4D97-AF65-F5344CB8AC3E}">
+        <p14:creationId xmlns:p14="http://schemas.microsoft.com/office/powerpoint/2010/main" val="3113870856"/>
+      </p:ext>
+    </p:extLst>
+  </p:cSld>
+  <p:clrMapOvr>
+    <a:masterClrMapping/>
+  </p:clrMapOvr>
+</p:sld>
+</file>
+
+<file path=ppt/slides/slide3.xml><?xml version="1.0" encoding="utf-8"?>
+<p:sld xmlns:a="http://schemas.openxmlformats.org/drawingml/2006/main" xmlns:r="http://schemas.openxmlformats.org/officeDocument/2006/relationships" xmlns:p="http://schemas.openxmlformats.org/presentationml/2006/main">
+  <p:cSld>
+    <p:spTree>
+      <p:nvGrpSpPr>
+        <p:cNvPr id="1" name=""/>
+        <p:cNvGrpSpPr/>
+        <p:nvPr/>
+      </p:nvGrpSpPr>
+      <p:grpSpPr>
+        <a:xfrm>
+          <a:off x="0" y="0"/>
+          <a:ext cx="0" cy="0"/>
+          <a:chOff x="0" y="0"/>
+          <a:chExt cx="0" cy="0"/>
+        </a:xfrm>
+      </p:grpSpPr>
+      <p:sp>
+        <p:nvSpPr>
+          <p:cNvPr id="4" name="TextBox 3">
+            <a:extLst>
+              <a:ext uri="{FF2B5EF4-FFF2-40B4-BE49-F238E27FC236}">
                 <a16:creationId xmlns:a16="http://schemas.microsoft.com/office/drawing/2014/main" id="{B57708ED-016C-8046-A356-CBD2F0FE6A01}"/>
               </a:ext>
             </a:extLst>
@@ -15344,7 +15812,7 @@
 </p:sld>
 </file>
 
-<file path=ppt/slides/slide3.xml><?xml version="1.0" encoding="utf-8"?>
+<file path=ppt/slides/slide4.xml><?xml version="1.0" encoding="utf-8"?>
 <p:sld xmlns:a="http://schemas.openxmlformats.org/drawingml/2006/main" xmlns:r="http://schemas.openxmlformats.org/officeDocument/2006/relationships" xmlns:p="http://schemas.openxmlformats.org/presentationml/2006/main">
   <p:cSld>
     <p:spTree>
@@ -16936,7 +17404,7 @@
 </p:sld>
 </file>
 
-<file path=ppt/slides/slide4.xml><?xml version="1.0" encoding="utf-8"?>
+<file path=ppt/slides/slide5.xml><?xml version="1.0" encoding="utf-8"?>
 <p:sld xmlns:a="http://schemas.openxmlformats.org/drawingml/2006/main" xmlns:r="http://schemas.openxmlformats.org/officeDocument/2006/relationships" xmlns:p="http://schemas.openxmlformats.org/presentationml/2006/main">
   <p:cSld>
     <p:spTree>
@@ -18613,7 +19081,7 @@
 </p:sld>
 </file>
 
-<file path=ppt/slides/slide5.xml><?xml version="1.0" encoding="utf-8"?>
+<file path=ppt/slides/slide6.xml><?xml version="1.0" encoding="utf-8"?>
 <p:sld xmlns:a="http://schemas.openxmlformats.org/drawingml/2006/main" xmlns:r="http://schemas.openxmlformats.org/officeDocument/2006/relationships" xmlns:p="http://schemas.openxmlformats.org/presentationml/2006/main">
   <p:cSld>
     <p:spTree>
@@ -19350,7 +19818,7 @@
 </p:sld>
 </file>
 
-<file path=ppt/slides/slide6.xml><?xml version="1.0" encoding="utf-8"?>
+<file path=ppt/slides/slide7.xml><?xml version="1.0" encoding="utf-8"?>
 <p:sld xmlns:a="http://schemas.openxmlformats.org/drawingml/2006/main" xmlns:r="http://schemas.openxmlformats.org/officeDocument/2006/relationships" xmlns:p="http://schemas.openxmlformats.org/presentationml/2006/main">
   <p:cSld>
     <p:spTree>
@@ -20270,7 +20738,7 @@
 </p:sld>
 </file>
 
-<file path=ppt/slides/slide7.xml><?xml version="1.0" encoding="utf-8"?>
+<file path=ppt/slides/slide8.xml><?xml version="1.0" encoding="utf-8"?>
 <p:sld xmlns:a="http://schemas.openxmlformats.org/drawingml/2006/main" xmlns:r="http://schemas.openxmlformats.org/officeDocument/2006/relationships" xmlns:p="http://schemas.openxmlformats.org/presentationml/2006/main">
   <p:cSld>
     <p:spTree>
